--- a/output/wordlabs-behave-3day.pptx
+++ b/output/wordlabs-behave-3day.pptx
@@ -23222,8 +23222,8 @@
         </p:nvSpPr>
         <p:spPr>
           <a:xfrm>
-            <a:off x="1951330" y="4169664"/>
-            <a:ext cx="676656" cy="475488"/>
+            <a:off x="1952244" y="4169664"/>
+            <a:ext cx="543652" cy="475488"/>
           </a:xfrm>
           <a:prstGeom prst="rect">
             <a:avLst>
@@ -23249,8 +23249,8 @@
         </p:nvSpPr>
         <p:spPr>
           <a:xfrm>
-            <a:off x="1951330" y="4169664"/>
-            <a:ext cx="676656" cy="475488"/>
+            <a:off x="1952244" y="4169664"/>
+            <a:ext cx="543652" cy="475488"/>
           </a:xfrm>
           <a:prstGeom prst="rect">
             <a:avLst/>
@@ -23288,8 +23288,8 @@
         </p:nvSpPr>
         <p:spPr>
           <a:xfrm>
-            <a:off x="2677363" y="4169664"/>
-            <a:ext cx="676656" cy="475488"/>
+            <a:off x="2546188" y="4169664"/>
+            <a:ext cx="543652" cy="475488"/>
           </a:xfrm>
           <a:prstGeom prst="rect">
             <a:avLst>
@@ -23315,8 +23315,8 @@
         </p:nvSpPr>
         <p:spPr>
           <a:xfrm>
-            <a:off x="2677363" y="4169664"/>
-            <a:ext cx="676656" cy="475488"/>
+            <a:off x="2546188" y="4169664"/>
+            <a:ext cx="543652" cy="475488"/>
           </a:xfrm>
           <a:prstGeom prst="rect">
             <a:avLst/>
@@ -23354,8 +23354,8 @@
         </p:nvSpPr>
         <p:spPr>
           <a:xfrm>
-            <a:off x="3403397" y="4169664"/>
-            <a:ext cx="676656" cy="475488"/>
+            <a:off x="3140133" y="4169664"/>
+            <a:ext cx="543652" cy="475488"/>
           </a:xfrm>
           <a:prstGeom prst="rect">
             <a:avLst>
@@ -23381,8 +23381,8 @@
         </p:nvSpPr>
         <p:spPr>
           <a:xfrm>
-            <a:off x="3403397" y="4169664"/>
-            <a:ext cx="676656" cy="475488"/>
+            <a:off x="3140133" y="4169664"/>
+            <a:ext cx="543652" cy="475488"/>
           </a:xfrm>
           <a:prstGeom prst="rect">
             <a:avLst/>
@@ -23420,8 +23420,8 @@
         </p:nvSpPr>
         <p:spPr>
           <a:xfrm>
-            <a:off x="4129430" y="4169664"/>
-            <a:ext cx="676656" cy="475488"/>
+            <a:off x="3734077" y="4169664"/>
+            <a:ext cx="543652" cy="475488"/>
           </a:xfrm>
           <a:prstGeom prst="rect">
             <a:avLst>
@@ -23447,8 +23447,8 @@
         </p:nvSpPr>
         <p:spPr>
           <a:xfrm>
-            <a:off x="4129430" y="4169664"/>
-            <a:ext cx="676656" cy="475488"/>
+            <a:off x="3734077" y="4169664"/>
+            <a:ext cx="543652" cy="475488"/>
           </a:xfrm>
           <a:prstGeom prst="rect">
             <a:avLst/>
@@ -23472,7 +23472,7 @@
                 <a:ea typeface="Trebuchet MS" pitchFamily="34" charset="-122"/>
                 <a:cs typeface="Trebuchet MS" pitchFamily="34" charset="-120"/>
               </a:rPr>
-              <a:t>b</a:t>
+              <a:t>-</a:t>
             </a:r>
             <a:endParaRPr lang="en-US" sz="900" dirty="0"/>
           </a:p>
@@ -23486,8 +23486,8 @@
         </p:nvSpPr>
         <p:spPr>
           <a:xfrm>
-            <a:off x="4855464" y="4169664"/>
-            <a:ext cx="676656" cy="475488"/>
+            <a:off x="4328021" y="4169664"/>
+            <a:ext cx="543652" cy="475488"/>
           </a:xfrm>
           <a:prstGeom prst="rect">
             <a:avLst>
@@ -23513,8 +23513,8 @@
         </p:nvSpPr>
         <p:spPr>
           <a:xfrm>
-            <a:off x="4855464" y="4169664"/>
-            <a:ext cx="676656" cy="475488"/>
+            <a:off x="4328021" y="4169664"/>
+            <a:ext cx="543652" cy="475488"/>
           </a:xfrm>
           <a:prstGeom prst="rect">
             <a:avLst/>
@@ -23538,7 +23538,7 @@
                 <a:ea typeface="Trebuchet MS" pitchFamily="34" charset="-122"/>
                 <a:cs typeface="Trebuchet MS" pitchFamily="34" charset="-120"/>
               </a:rPr>
-              <a:t>e</a:t>
+              <a:t>b</a:t>
             </a:r>
             <a:endParaRPr lang="en-US" sz="900" dirty="0"/>
           </a:p>
@@ -23552,8 +23552,8 @@
         </p:nvSpPr>
         <p:spPr>
           <a:xfrm>
-            <a:off x="5581498" y="4169664"/>
-            <a:ext cx="676656" cy="475488"/>
+            <a:off x="4921966" y="4169664"/>
+            <a:ext cx="543652" cy="475488"/>
           </a:xfrm>
           <a:prstGeom prst="rect">
             <a:avLst>
@@ -23579,8 +23579,8 @@
         </p:nvSpPr>
         <p:spPr>
           <a:xfrm>
-            <a:off x="5581498" y="4169664"/>
-            <a:ext cx="676656" cy="475488"/>
+            <a:off x="4921966" y="4169664"/>
+            <a:ext cx="543652" cy="475488"/>
           </a:xfrm>
           <a:prstGeom prst="rect">
             <a:avLst/>
@@ -23604,7 +23604,7 @@
                 <a:ea typeface="Trebuchet MS" pitchFamily="34" charset="-122"/>
                 <a:cs typeface="Trebuchet MS" pitchFamily="34" charset="-120"/>
               </a:rPr>
-              <a:t>h</a:t>
+              <a:t>e</a:t>
             </a:r>
             <a:endParaRPr lang="en-US" sz="900" dirty="0"/>
           </a:p>
@@ -23618,8 +23618,8 @@
         </p:nvSpPr>
         <p:spPr>
           <a:xfrm>
-            <a:off x="6307531" y="4169664"/>
-            <a:ext cx="676656" cy="475488"/>
+            <a:off x="5515910" y="4169664"/>
+            <a:ext cx="543652" cy="475488"/>
           </a:xfrm>
           <a:prstGeom prst="rect">
             <a:avLst>
@@ -23645,8 +23645,8 @@
         </p:nvSpPr>
         <p:spPr>
           <a:xfrm>
-            <a:off x="6307531" y="4169664"/>
-            <a:ext cx="676656" cy="475488"/>
+            <a:off x="5515910" y="4169664"/>
+            <a:ext cx="543652" cy="475488"/>
           </a:xfrm>
           <a:prstGeom prst="rect">
             <a:avLst/>
@@ -23670,7 +23670,7 @@
                 <a:ea typeface="Trebuchet MS" pitchFamily="34" charset="-122"/>
                 <a:cs typeface="Trebuchet MS" pitchFamily="34" charset="-120"/>
               </a:rPr>
-              <a:t>a</a:t>
+              <a:t>h</a:t>
             </a:r>
             <a:endParaRPr lang="en-US" sz="900" dirty="0"/>
           </a:p>
@@ -23684,8 +23684,8 @@
         </p:nvSpPr>
         <p:spPr>
           <a:xfrm>
-            <a:off x="7033565" y="4169664"/>
-            <a:ext cx="676656" cy="475488"/>
+            <a:off x="6109855" y="4169664"/>
+            <a:ext cx="543652" cy="475488"/>
           </a:xfrm>
           <a:prstGeom prst="rect">
             <a:avLst>
@@ -23711,8 +23711,8 @@
         </p:nvSpPr>
         <p:spPr>
           <a:xfrm>
-            <a:off x="7033565" y="4169664"/>
-            <a:ext cx="676656" cy="475488"/>
+            <a:off x="6109855" y="4169664"/>
+            <a:ext cx="543652" cy="475488"/>
           </a:xfrm>
           <a:prstGeom prst="rect">
             <a:avLst/>
@@ -23736,7 +23736,7 @@
                 <a:ea typeface="Trebuchet MS" pitchFamily="34" charset="-122"/>
                 <a:cs typeface="Trebuchet MS" pitchFamily="34" charset="-120"/>
               </a:rPr>
-              <a:t>v</a:t>
+              <a:t>a</a:t>
             </a:r>
             <a:endParaRPr lang="en-US" sz="900" dirty="0"/>
           </a:p>
@@ -23750,8 +23750,8 @@
         </p:nvSpPr>
         <p:spPr>
           <a:xfrm>
-            <a:off x="7759598" y="4169664"/>
-            <a:ext cx="676656" cy="475488"/>
+            <a:off x="6703799" y="4169664"/>
+            <a:ext cx="543652" cy="475488"/>
           </a:xfrm>
           <a:prstGeom prst="rect">
             <a:avLst>
@@ -23777,8 +23777,8 @@
         </p:nvSpPr>
         <p:spPr>
           <a:xfrm>
-            <a:off x="7759598" y="4169664"/>
-            <a:ext cx="676656" cy="475488"/>
+            <a:off x="6703799" y="4169664"/>
+            <a:ext cx="543652" cy="475488"/>
           </a:xfrm>
           <a:prstGeom prst="rect">
             <a:avLst/>
@@ -23802,7 +23802,139 @@
                 <a:ea typeface="Trebuchet MS" pitchFamily="34" charset="-122"/>
                 <a:cs typeface="Trebuchet MS" pitchFamily="34" charset="-120"/>
               </a:rPr>
-              <a:t>ed</a:t>
+              <a:t>v</a:t>
+            </a:r>
+            <a:endParaRPr lang="en-US" sz="900" dirty="0"/>
+          </a:p>
+        </p:txBody>
+      </p:sp>
+      <p:sp>
+        <p:nvSpPr>
+          <p:cNvPr id="55" name="Shape 53"/>
+          <p:cNvSpPr/>
+          <p:nvPr/>
+        </p:nvSpPr>
+        <p:spPr>
+          <a:xfrm>
+            <a:off x="7297743" y="4169664"/>
+            <a:ext cx="543652" cy="475488"/>
+          </a:xfrm>
+          <a:prstGeom prst="rect">
+            <a:avLst>
+              <a:gd name="adj" fmla="val 7692"/>
+            </a:avLst>
+          </a:prstGeom>
+          <a:solidFill>
+            <a:srgbClr val="FFFFFF"/>
+          </a:solidFill>
+          <a:ln w="12700">
+            <a:solidFill>
+              <a:srgbClr val="DB2777"/>
+            </a:solidFill>
+            <a:prstDash val="solid"/>
+          </a:ln>
+        </p:spPr>
+      </p:sp>
+      <p:sp>
+        <p:nvSpPr>
+          <p:cNvPr id="56" name="Text 54"/>
+          <p:cNvSpPr/>
+          <p:nvPr/>
+        </p:nvSpPr>
+        <p:spPr>
+          <a:xfrm>
+            <a:off x="7297743" y="4169664"/>
+            <a:ext cx="543652" cy="475488"/>
+          </a:xfrm>
+          <a:prstGeom prst="rect">
+            <a:avLst/>
+          </a:prstGeom>
+          <a:noFill/>
+          <a:ln/>
+        </p:spPr>
+        <p:txBody>
+          <a:bodyPr wrap="square" lIns="0" tIns="0" rIns="0" bIns="0" rtlCol="0" anchor="ctr"/>
+          <a:lstStyle/>
+          <a:p>
+            <a:pPr algn="ctr" indent="0" marL="0">
+              <a:buNone/>
+            </a:pPr>
+            <a:r>
+              <a:rPr lang="en-US" sz="900" b="1" dirty="0">
+                <a:solidFill>
+                  <a:srgbClr val="9D174D"/>
+                </a:solidFill>
+                <a:latin typeface="Trebuchet MS" pitchFamily="34" charset="0"/>
+                <a:ea typeface="Trebuchet MS" pitchFamily="34" charset="-122"/>
+                <a:cs typeface="Trebuchet MS" pitchFamily="34" charset="-120"/>
+              </a:rPr>
+              <a:t>e</a:t>
+            </a:r>
+            <a:endParaRPr lang="en-US" sz="900" dirty="0"/>
+          </a:p>
+        </p:txBody>
+      </p:sp>
+      <p:sp>
+        <p:nvSpPr>
+          <p:cNvPr id="57" name="Shape 55"/>
+          <p:cNvSpPr/>
+          <p:nvPr/>
+        </p:nvSpPr>
+        <p:spPr>
+          <a:xfrm>
+            <a:off x="7891688" y="4169664"/>
+            <a:ext cx="543652" cy="475488"/>
+          </a:xfrm>
+          <a:prstGeom prst="rect">
+            <a:avLst>
+              <a:gd name="adj" fmla="val 7692"/>
+            </a:avLst>
+          </a:prstGeom>
+          <a:solidFill>
+            <a:srgbClr val="FFFFFF"/>
+          </a:solidFill>
+          <a:ln w="12700">
+            <a:solidFill>
+              <a:srgbClr val="DB2777"/>
+            </a:solidFill>
+            <a:prstDash val="solid"/>
+          </a:ln>
+        </p:spPr>
+      </p:sp>
+      <p:sp>
+        <p:nvSpPr>
+          <p:cNvPr id="58" name="Text 56"/>
+          <p:cNvSpPr/>
+          <p:nvPr/>
+        </p:nvSpPr>
+        <p:spPr>
+          <a:xfrm>
+            <a:off x="7891688" y="4169664"/>
+            <a:ext cx="543652" cy="475488"/>
+          </a:xfrm>
+          <a:prstGeom prst="rect">
+            <a:avLst/>
+          </a:prstGeom>
+          <a:noFill/>
+          <a:ln/>
+        </p:spPr>
+        <p:txBody>
+          <a:bodyPr wrap="square" lIns="0" tIns="0" rIns="0" bIns="0" rtlCol="0" anchor="ctr"/>
+          <a:lstStyle/>
+          <a:p>
+            <a:pPr algn="ctr" indent="0" marL="0">
+              <a:buNone/>
+            </a:pPr>
+            <a:r>
+              <a:rPr lang="en-US" sz="900" b="1" dirty="0">
+                <a:solidFill>
+                  <a:srgbClr val="9D174D"/>
+                </a:solidFill>
+                <a:latin typeface="Trebuchet MS" pitchFamily="34" charset="0"/>
+                <a:ea typeface="Trebuchet MS" pitchFamily="34" charset="-122"/>
+                <a:cs typeface="Trebuchet MS" pitchFamily="34" charset="-120"/>
+              </a:rPr>
+              <a:t>d</a:t>
             </a:r>
             <a:endParaRPr lang="en-US" sz="900" dirty="0"/>
           </a:p>
@@ -39384,7 +39516,7 @@
                 <a:ea typeface="Calibri" pitchFamily="34" charset="-122"/>
                 <a:cs typeface="Calibri" pitchFamily="34" charset="-120"/>
               </a:rPr>
-              <a:t>1.  The root 'behave' comes from the Greek language.</a:t>
+              <a:t>1.  'Behaviour' is a noun that describes the way someone acts.</a:t>
             </a:r>
             <a:endParaRPr lang="en-US" sz="1300" dirty="0"/>
           </a:p>
@@ -39407,11 +39539,11 @@
             </a:avLst>
           </a:prstGeom>
           <a:solidFill>
-            <a:srgbClr val="FEE2E2"/>
-          </a:solidFill>
-          <a:ln w="12700">
-            <a:solidFill>
-              <a:srgbClr val="DC2626"/>
+            <a:srgbClr val="DCFCE7"/>
+          </a:solidFill>
+          <a:ln w="12700">
+            <a:solidFill>
+              <a:srgbClr val="16A34A"/>
             </a:solidFill>
             <a:prstDash val="solid"/>
           </a:ln>
@@ -39444,13 +39576,13 @@
             <a:r>
               <a:rPr lang="en-US" sz="1100" b="1" dirty="0">
                 <a:solidFill>
-                  <a:srgbClr val="DC2626"/>
+                  <a:srgbClr val="16A34A"/>
                 </a:solidFill>
                 <a:latin typeface="Trebuchet MS" pitchFamily="34" charset="0"/>
                 <a:ea typeface="Trebuchet MS" pitchFamily="34" charset="-122"/>
                 <a:cs typeface="Trebuchet MS" pitchFamily="34" charset="-120"/>
               </a:rPr>
-              <a:t>FALSE</a:t>
+              <a:t>TRUE</a:t>
             </a:r>
             <a:endParaRPr lang="en-US" sz="1100" dirty="0"/>
           </a:p>
@@ -39662,7 +39794,7 @@
                 <a:ea typeface="Calibri" pitchFamily="34" charset="-122"/>
                 <a:cs typeface="Calibri" pitchFamily="34" charset="-120"/>
               </a:rPr>
-              <a:t>3.  'Behaviour' is a noun that describes the way someone acts.</a:t>
+              <a:t>3.  The word 'behaving' contains the root morpheme 'behave'.</a:t>
             </a:r>
             <a:endParaRPr lang="en-US" sz="1300" dirty="0"/>
           </a:p>
@@ -39801,7 +39933,7 @@
                 <a:ea typeface="Calibri" pitchFamily="34" charset="-122"/>
                 <a:cs typeface="Calibri" pitchFamily="34" charset="-120"/>
               </a:rPr>
-              <a:t>4.  The word 'behaving' contains the root morpheme 'behave'.</a:t>
+              <a:t>4.  The root 'behave' comes from the Greek language.</a:t>
             </a:r>
             <a:endParaRPr lang="en-US" sz="1300" dirty="0"/>
           </a:p>
@@ -39824,11 +39956,11 @@
             </a:avLst>
           </a:prstGeom>
           <a:solidFill>
-            <a:srgbClr val="DCFCE7"/>
-          </a:solidFill>
-          <a:ln w="12700">
-            <a:solidFill>
-              <a:srgbClr val="16A34A"/>
+            <a:srgbClr val="FEE2E2"/>
+          </a:solidFill>
+          <a:ln w="12700">
+            <a:solidFill>
+              <a:srgbClr val="DC2626"/>
             </a:solidFill>
             <a:prstDash val="solid"/>
           </a:ln>
@@ -39861,13 +39993,13 @@
             <a:r>
               <a:rPr lang="en-US" sz="1100" b="1" dirty="0">
                 <a:solidFill>
-                  <a:srgbClr val="16A34A"/>
+                  <a:srgbClr val="DC2626"/>
                 </a:solidFill>
                 <a:latin typeface="Trebuchet MS" pitchFamily="34" charset="0"/>
                 <a:ea typeface="Trebuchet MS" pitchFamily="34" charset="-122"/>
                 <a:cs typeface="Trebuchet MS" pitchFamily="34" charset="-120"/>
               </a:rPr>
-              <a:t>TRUE</a:t>
+              <a:t>FALSE</a:t>
             </a:r>
             <a:endParaRPr lang="en-US" sz="1100" dirty="0"/>
           </a:p>
